--- a/presentacion/Cursor_Presentacion_EN.pptx
+++ b/presentacion/Cursor_Presentacion_EN.pptx
@@ -34794,7 +34794,7 @@
                 </a:solidFill>
                 <a:latin typeface="Segoe UI"/>
               </a:rPr>
-              <a:t>Docs = source of truth; graph derived (one publisher)</a:t>
+              <a:t>ONE publisher. Derived is per file, not per folder</a:t>
             </a:r>
           </a:p>
         </p:txBody>
@@ -39883,7 +39883,7 @@
                 </a:solidFill>
                 <a:latin typeface="Segoe UI"/>
               </a:rPr>
-              <a:t>Recall in dense zones · EXTRACTED = reliable, INFERRED = hint · internal (data/) · derived: never travels, rebuild it</a:t>
+              <a:t>Recall in dense zones · EXTRACTED = reliable, INFERRED = hint · internal (data/) · derived rebuilds, but hand-authored travels</a:t>
             </a:r>
           </a:p>
         </p:txBody>
